--- a/capstone/Capstone_6_Panel_Narrative_Deck.pptx
+++ b/capstone/Capstone_6_Panel_Narrative_Deck.pptx
@@ -3109,7 +3109,7 @@
           <a:lstStyle/>
           <a:p>
             <a:r>
-              <a:t>Cloud Transformation Simulation Portfolio</a:t>
+              <a:t>AI Degree Advisor — Simulation Portfolio</a:t>
             </a:r>
           </a:p>
         </p:txBody>
@@ -3130,7 +3130,7 @@
           <a:lstStyle/>
           <a:p>
             <a:r>
-              <a:t>6-panel narrative deck across cost, reliability, and adoption outcomes</a:t>
+              <a:t>Cloud + AI academic advising: pathways, excess credits, completion — scale advising without scaling staff</a:t>
             </a:r>
           </a:p>
         </p:txBody>
@@ -3210,7 +3210,7 @@
               <a:defRPr sz="1500"/>
             </a:pPr>
             <a:r>
-              <a:t>Set the baseline economics and ROI sensitivity over 5 years to frame investment decisions.</a:t>
+              <a:t>Frame ~$500K annual platform economics and multi-year ROI for AI Degree Advisor.</a:t>
             </a:r>
           </a:p>
         </p:txBody>
@@ -3318,7 +3318,7 @@
               <a:defRPr sz="2800" b="1"/>
             </a:pPr>
             <a:r>
-              <a:t>Panel 5: DevOps Automation Impact</a:t>
+              <a:t>Panel 5: Platform Delivery &amp; Automation</a:t>
             </a:r>
           </a:p>
         </p:txBody>
@@ -3349,7 +3349,7 @@
               <a:defRPr sz="1500"/>
             </a:pPr>
             <a:r>
-              <a:t>Show how automation and team design influence deployment speed and failure reduction.</a:t>
+              <a:t>Reliable releases for models, APIs, and integrations that students and advisors depend on.</a:t>
             </a:r>
           </a:p>
         </p:txBody>
@@ -3457,7 +3457,7 @@
               <a:defRPr sz="2800" b="1"/>
             </a:pPr>
             <a:r>
-              <a:t>Panel 6: Uptime vs Cost Trade-off</a:t>
+              <a:t>Panel 6: Reliability vs Cost</a:t>
             </a:r>
           </a:p>
         </p:txBody>
@@ -3488,7 +3488,7 @@
               <a:defRPr sz="1500"/>
             </a:pPr>
             <a:r>
-              <a:t>Demonstrate resilience design choices and the cost required to achieve uptime targets.</a:t>
+              <a:t>Balance uptime for peak registration and advising seasons against monthly cloud run rate.</a:t>
             </a:r>
           </a:p>
         </p:txBody>
@@ -3596,7 +3596,7 @@
               <a:defRPr sz="2800" b="1"/>
             </a:pPr>
             <a:r>
-              <a:t>Panel 8/9: Adoption Dynamics</a:t>
+              <a:t>Panel 8/9: Advisor &amp; Student Adoption</a:t>
             </a:r>
           </a:p>
         </p:txBody>
@@ -3627,7 +3627,7 @@
               <a:defRPr sz="1500"/>
             </a:pPr>
             <a:r>
-              <a:t>Link internal adoption readiness with customer diffusion to explain scale-up timing.</a:t>
+              <a:t>Advisor workflow adoption plus student diffusion — network effects accelerate student-facing rollout.</a:t>
             </a:r>
           </a:p>
         </p:txBody>
@@ -3774,7 +3774,7 @@
               <a:defRPr sz="1600"/>
             </a:pPr>
             <a:r>
-              <a:t>- ROI: ~62.8% over 3-year horizon</a:t>
+              <a:t>- Annual platform cost (illustrative): ~$500K</a:t>
             </a:r>
           </a:p>
           <a:p>
@@ -3782,7 +3782,7 @@
               <a:defRPr sz="1600"/>
             </a:pPr>
             <a:r>
-              <a:t>- Expected Uptime: ~99.36% (Redundancy 3, Single-Region)</a:t>
+              <a:t>- Value vs. investment (year one): 2–4× when outcomes land</a:t>
             </a:r>
           </a:p>
           <a:p>
@@ -3790,7 +3790,7 @@
               <a:defRPr sz="1600"/>
             </a:pPr>
             <a:r>
-              <a:t>- Adoption: ~80%+ achievable by month 6 with strong enablement</a:t>
+              <a:t>- Targets: −10–15% time-to-degree, ~−20% excess credits, −25–30% advisor workload</a:t>
             </a:r>
           </a:p>
         </p:txBody>
@@ -3848,7 +3848,7 @@
               <a:defRPr sz="1400"/>
             </a:pPr>
             <a:r>
-              <a:t>1) Prioritize reliability investments that maximize uptime before scaling spend.</a:t>
+              <a:t>1) Treat uptime as a student-success asset: registration and pathway guidance must be dependable.</a:t>
             </a:r>
           </a:p>
           <a:p>
@@ -3856,7 +3856,7 @@
               <a:defRPr sz="1400"/>
             </a:pPr>
             <a:r>
-              <a:t>2) Use automation gains to improve customer trust and reduce adoption friction.</a:t>
+              <a:t>2) Invest in AI + clean academic data (rules, transcripts) before scaling marketing to students.</a:t>
             </a:r>
           </a:p>
           <a:p>
@@ -3864,7 +3864,7 @@
               <a:defRPr sz="1400"/>
             </a:pPr>
             <a:r>
-              <a:t>3) Coordinate leadership engagement and training with go-to-market execution.</a:t>
+              <a:t>3) Train advisors and leaders together so workload shifts from triage to high-touch coaching.</a:t>
             </a:r>
           </a:p>
           <a:p>
@@ -3872,7 +3872,7 @@
               <a:defRPr sz="1400"/>
             </a:pPr>
             <a:r>
-              <a:t>4) Monitor ROI, uptime, and adoption together as a single operating dashboard.</a:t>
+              <a:t>4) Track unit economics: ~$500K annual cost pays back when completion and efficiency gains hit target bands.</a:t>
             </a:r>
           </a:p>
         </p:txBody>
